--- a/1年前期夏課題.pptx
+++ b/1年前期夏課題.pptx
@@ -227,7 +227,7 @@
           <a:p>
             <a:fld id="{C9C3C1B3-0E61-4942-A09A-02F2EAE54150}" type="datetimeFigureOut">
               <a:rPr kumimoji="1" lang="ja-JP" altLang="en-US" smtClean="0"/>
-              <a:t>2024/10/23</a:t>
+              <a:t>2026/4/10</a:t>
             </a:fld>
             <a:endParaRPr kumimoji="1" lang="ja-JP" altLang="en-US"/>
           </a:p>
@@ -673,7 +673,7 @@
           <a:p>
             <a:fld id="{691E08CE-871E-42A1-882B-8194E9FA60B7}" type="datetimeFigureOut">
               <a:rPr kumimoji="1" lang="ja-JP" altLang="en-US" smtClean="0"/>
-              <a:t>2024/10/23</a:t>
+              <a:t>2026/4/10</a:t>
             </a:fld>
             <a:endParaRPr kumimoji="1" lang="ja-JP" altLang="en-US"/>
           </a:p>
@@ -903,7 +903,7 @@
           <a:p>
             <a:fld id="{691E08CE-871E-42A1-882B-8194E9FA60B7}" type="datetimeFigureOut">
               <a:rPr kumimoji="1" lang="ja-JP" altLang="en-US" smtClean="0"/>
-              <a:t>2024/10/23</a:t>
+              <a:t>2026/4/10</a:t>
             </a:fld>
             <a:endParaRPr kumimoji="1" lang="ja-JP" altLang="en-US"/>
           </a:p>
@@ -1143,7 +1143,7 @@
           <a:p>
             <a:fld id="{691E08CE-871E-42A1-882B-8194E9FA60B7}" type="datetimeFigureOut">
               <a:rPr kumimoji="1" lang="ja-JP" altLang="en-US" smtClean="0"/>
-              <a:t>2024/10/23</a:t>
+              <a:t>2026/4/10</a:t>
             </a:fld>
             <a:endParaRPr kumimoji="1" lang="ja-JP" altLang="en-US"/>
           </a:p>
@@ -1373,7 +1373,7 @@
           <a:p>
             <a:fld id="{691E08CE-871E-42A1-882B-8194E9FA60B7}" type="datetimeFigureOut">
               <a:rPr kumimoji="1" lang="ja-JP" altLang="en-US" smtClean="0"/>
-              <a:t>2024/10/23</a:t>
+              <a:t>2026/4/10</a:t>
             </a:fld>
             <a:endParaRPr kumimoji="1" lang="ja-JP" altLang="en-US"/>
           </a:p>
@@ -1648,7 +1648,7 @@
           <a:p>
             <a:fld id="{691E08CE-871E-42A1-882B-8194E9FA60B7}" type="datetimeFigureOut">
               <a:rPr kumimoji="1" lang="ja-JP" altLang="en-US" smtClean="0"/>
-              <a:t>2024/10/23</a:t>
+              <a:t>2026/4/10</a:t>
             </a:fld>
             <a:endParaRPr kumimoji="1" lang="ja-JP" altLang="en-US"/>
           </a:p>
@@ -1977,7 +1977,7 @@
           <a:p>
             <a:fld id="{691E08CE-871E-42A1-882B-8194E9FA60B7}" type="datetimeFigureOut">
               <a:rPr kumimoji="1" lang="ja-JP" altLang="en-US" smtClean="0"/>
-              <a:t>2024/10/23</a:t>
+              <a:t>2026/4/10</a:t>
             </a:fld>
             <a:endParaRPr kumimoji="1" lang="ja-JP" altLang="en-US"/>
           </a:p>
@@ -2453,7 +2453,7 @@
           <a:p>
             <a:fld id="{691E08CE-871E-42A1-882B-8194E9FA60B7}" type="datetimeFigureOut">
               <a:rPr kumimoji="1" lang="ja-JP" altLang="en-US" smtClean="0"/>
-              <a:t>2024/10/23</a:t>
+              <a:t>2026/4/10</a:t>
             </a:fld>
             <a:endParaRPr kumimoji="1" lang="ja-JP" altLang="en-US"/>
           </a:p>
@@ -2594,7 +2594,7 @@
           <a:p>
             <a:fld id="{691E08CE-871E-42A1-882B-8194E9FA60B7}" type="datetimeFigureOut">
               <a:rPr kumimoji="1" lang="ja-JP" altLang="en-US" smtClean="0"/>
-              <a:t>2024/10/23</a:t>
+              <a:t>2026/4/10</a:t>
             </a:fld>
             <a:endParaRPr kumimoji="1" lang="ja-JP" altLang="en-US"/>
           </a:p>
@@ -2707,7 +2707,7 @@
           <a:p>
             <a:fld id="{691E08CE-871E-42A1-882B-8194E9FA60B7}" type="datetimeFigureOut">
               <a:rPr kumimoji="1" lang="ja-JP" altLang="en-US" smtClean="0"/>
-              <a:t>2024/10/23</a:t>
+              <a:t>2026/4/10</a:t>
             </a:fld>
             <a:endParaRPr kumimoji="1" lang="ja-JP" altLang="en-US"/>
           </a:p>
@@ -3050,7 +3050,7 @@
           <a:p>
             <a:fld id="{691E08CE-871E-42A1-882B-8194E9FA60B7}" type="datetimeFigureOut">
               <a:rPr kumimoji="1" lang="ja-JP" altLang="en-US" smtClean="0"/>
-              <a:t>2024/10/23</a:t>
+              <a:t>2026/4/10</a:t>
             </a:fld>
             <a:endParaRPr kumimoji="1" lang="ja-JP" altLang="en-US"/>
           </a:p>
@@ -3338,7 +3338,7 @@
           <a:p>
             <a:fld id="{691E08CE-871E-42A1-882B-8194E9FA60B7}" type="datetimeFigureOut">
               <a:rPr kumimoji="1" lang="ja-JP" altLang="en-US" smtClean="0"/>
-              <a:t>2024/10/23</a:t>
+              <a:t>2026/4/10</a:t>
             </a:fld>
             <a:endParaRPr kumimoji="1" lang="ja-JP" altLang="en-US"/>
           </a:p>
@@ -3611,7 +3611,7 @@
           <a:p>
             <a:fld id="{691E08CE-871E-42A1-882B-8194E9FA60B7}" type="datetimeFigureOut">
               <a:rPr kumimoji="1" lang="ja-JP" altLang="en-US" smtClean="0"/>
-              <a:t>2024/10/23</a:t>
+              <a:t>2026/4/10</a:t>
             </a:fld>
             <a:endParaRPr kumimoji="1" lang="ja-JP" altLang="en-US"/>
           </a:p>
@@ -4219,8 +4219,8 @@
         </p:nvSpPr>
         <p:spPr>
           <a:xfrm>
-            <a:off x="694521" y="1443841"/>
-            <a:ext cx="11089895" cy="3785652"/>
+            <a:off x="163125" y="1131020"/>
+            <a:ext cx="11865749" cy="5632311"/>
           </a:xfrm>
           <a:prstGeom prst="rect">
             <a:avLst/>
@@ -4234,8 +4234,12 @@
           <a:lstStyle/>
           <a:p>
             <a:r>
+              <a:rPr kumimoji="1" lang="ja-JP" altLang="en-US" sz="4000" b="1" u="sng" dirty="0"/>
+              <a:t>期限：</a:t>
+            </a:r>
+            <a:r>
               <a:rPr kumimoji="1" lang="ja-JP" altLang="en-US" sz="4000" dirty="0"/>
-              <a:t>期限：夏休み明け</a:t>
+              <a:t>夏休み明け</a:t>
             </a:r>
             <a:r>
               <a:rPr kumimoji="1" lang="en-US" altLang="ja-JP" sz="4000" dirty="0"/>
@@ -4249,85 +4253,158 @@
           </a:p>
           <a:p>
             <a:r>
-              <a:rPr kumimoji="1" lang="ja-JP" altLang="en-US" sz="4000" dirty="0"/>
+              <a:rPr kumimoji="1" lang="ja-JP" altLang="en-US" sz="4000" b="1" u="sng" dirty="0"/>
               <a:t>内容：</a:t>
             </a:r>
             <a:r>
               <a:rPr lang="ja-JP" altLang="en-US" sz="4000" dirty="0"/>
-              <a:t>期限までに</a:t>
-            </a:r>
+              <a:t>期限までにゲームを作る</a:t>
+            </a:r>
+            <a:endParaRPr kumimoji="1" lang="en-US" altLang="ja-JP" sz="4000" dirty="0"/>
+          </a:p>
+          <a:p>
+            <a:r>
+              <a:rPr lang="ja-JP" altLang="en-US" sz="4000" b="1" u="sng" dirty="0"/>
+              <a:t>制限：</a:t>
+            </a:r>
+            <a:endParaRPr lang="en-US" altLang="ja-JP" sz="4000" b="1" u="sng" dirty="0"/>
+          </a:p>
+          <a:p>
             <a:r>
               <a:rPr lang="en-US" altLang="ja-JP" sz="4000" dirty="0"/>
-              <a:t>Unity</a:t>
+              <a:t>2D</a:t>
             </a:r>
             <a:r>
               <a:rPr lang="ja-JP" altLang="en-US" sz="4000" dirty="0"/>
-              <a:t>で</a:t>
+              <a:t>ゲーム</a:t>
             </a:r>
             <a:r>
               <a:rPr lang="en-US" altLang="ja-JP" sz="4000" dirty="0"/>
-              <a:t>2Dor3D</a:t>
+              <a:t>(</a:t>
+            </a:r>
+            <a:r>
+              <a:rPr lang="en-US" altLang="ja-JP" sz="4000" dirty="0" err="1"/>
+              <a:t>Dxlib</a:t>
             </a:r>
             <a:r>
               <a:rPr lang="ja-JP" altLang="en-US" sz="4000" dirty="0"/>
-              <a:t>ゲームを作る</a:t>
+              <a:t>のみ可</a:t>
+            </a:r>
+            <a:r>
+              <a:rPr lang="en-US" altLang="ja-JP" sz="4000" dirty="0"/>
+              <a:t>)</a:t>
+            </a:r>
+          </a:p>
+          <a:p>
+            <a:r>
+              <a:rPr lang="en-US" altLang="ja-JP" sz="4000" dirty="0"/>
+              <a:t>3D</a:t>
+            </a:r>
+            <a:r>
+              <a:rPr lang="ja-JP" altLang="en-US" sz="4000" dirty="0"/>
+              <a:t>ゲーム</a:t>
+            </a:r>
+            <a:r>
+              <a:rPr lang="en-US" altLang="ja-JP" sz="4000" dirty="0"/>
+              <a:t>(Unity</a:t>
+            </a:r>
+            <a:r>
+              <a:rPr lang="ja-JP" altLang="en-US" sz="4000" dirty="0"/>
+              <a:t>も可</a:t>
+            </a:r>
+            <a:r>
+              <a:rPr lang="en-US" altLang="ja-JP" sz="4000" dirty="0"/>
+              <a:t>)</a:t>
             </a:r>
             <a:endParaRPr kumimoji="1" lang="en-US" altLang="ja-JP" sz="4000" dirty="0"/>
           </a:p>
           <a:p>
             <a:r>
+              <a:rPr lang="ja-JP" altLang="en-US" sz="4000" b="1" u="sng" dirty="0"/>
+              <a:t>個人かチームか</a:t>
+            </a:r>
+            <a:r>
+              <a:rPr kumimoji="1" lang="ja-JP" altLang="en-US" sz="4000" b="1" u="sng" dirty="0"/>
+              <a:t>：</a:t>
+            </a:r>
+            <a:endParaRPr lang="en-US" altLang="ja-JP" sz="4000" b="1" u="sng" dirty="0"/>
+          </a:p>
+          <a:p>
+            <a:r>
               <a:rPr lang="ja-JP" altLang="en-US" sz="4000" dirty="0"/>
-              <a:t>制限：</a:t>
-            </a:r>
-            <a:r>
-              <a:rPr lang="en-US" altLang="ja-JP" sz="4000" dirty="0"/>
-              <a:t>Unity</a:t>
-            </a:r>
-            <a:r>
-              <a:rPr lang="ja-JP" altLang="en-US" sz="4000" dirty="0"/>
-              <a:t>で作成された作品であること。</a:t>
-            </a:r>
-            <a:endParaRPr kumimoji="1" lang="en-US" altLang="ja-JP" sz="4000" dirty="0"/>
-          </a:p>
-          <a:p>
-            <a:r>
-              <a:rPr kumimoji="1" lang="ja-JP" altLang="en-US" sz="4000" dirty="0"/>
-              <a:t>制作発表：</a:t>
+              <a:t>どちらでも可</a:t>
             </a:r>
             <a:endParaRPr lang="en-US" altLang="ja-JP" sz="4000" dirty="0"/>
           </a:p>
           <a:p>
             <a:r>
-              <a:rPr kumimoji="1" lang="ja-JP" altLang="en-US" sz="4000" dirty="0"/>
-              <a:t>個人でもチームでも、個人単位で発表させます</a:t>
-            </a:r>
-            <a:r>
-              <a:rPr lang="en-US" altLang="ja-JP" sz="4000" dirty="0"/>
-              <a:t>.</a:t>
-            </a:r>
-          </a:p>
-          <a:p>
-            <a:r>
-              <a:rPr kumimoji="1" lang="ja-JP" altLang="en-US" sz="4000" dirty="0"/>
-              <a:t>持ち時間：発表　</a:t>
-            </a:r>
-            <a:r>
-              <a:rPr kumimoji="1" lang="en-US" altLang="ja-JP" sz="4000" dirty="0"/>
-              <a:t>5~10</a:t>
-            </a:r>
-            <a:r>
-              <a:rPr kumimoji="1" lang="ja-JP" altLang="en-US" sz="4000" dirty="0"/>
-              <a:t>分　質疑応答　５</a:t>
-            </a:r>
-            <a:r>
-              <a:rPr kumimoji="1" lang="en-US" altLang="ja-JP" sz="4000" dirty="0"/>
-              <a:t>~10</a:t>
-            </a:r>
-            <a:r>
-              <a:rPr kumimoji="1" lang="ja-JP" altLang="en-US" sz="4000" dirty="0"/>
-              <a:t>分</a:t>
-            </a:r>
-            <a:endParaRPr kumimoji="1" lang="en-US" altLang="ja-JP" sz="4000" dirty="0"/>
+              <a:rPr lang="en-US" altLang="ja-JP" sz="4000" b="1" dirty="0">
+                <a:solidFill>
+                  <a:srgbClr val="FF0000"/>
+                </a:solidFill>
+              </a:rPr>
+              <a:t>※</a:t>
+            </a:r>
+            <a:r>
+              <a:rPr lang="ja-JP" altLang="en-US" sz="4000" b="1" dirty="0">
+                <a:solidFill>
+                  <a:srgbClr val="FF0000"/>
+                </a:solidFill>
+              </a:rPr>
+              <a:t>個人で</a:t>
+            </a:r>
+            <a:r>
+              <a:rPr lang="en-US" altLang="ja-JP" sz="4000" b="1" dirty="0">
+                <a:solidFill>
+                  <a:srgbClr val="FF0000"/>
+                </a:solidFill>
+              </a:rPr>
+              <a:t>2D</a:t>
+            </a:r>
+            <a:r>
+              <a:rPr lang="ja-JP" altLang="en-US" sz="4000" b="1" dirty="0">
+                <a:solidFill>
+                  <a:srgbClr val="FF0000"/>
+                </a:solidFill>
+              </a:rPr>
+              <a:t>ゲームを作りつつ、</a:t>
+            </a:r>
+            <a:endParaRPr lang="en-US" altLang="ja-JP" sz="4000" b="1" dirty="0">
+              <a:solidFill>
+                <a:srgbClr val="FF0000"/>
+              </a:solidFill>
+            </a:endParaRPr>
+          </a:p>
+          <a:p>
+            <a:r>
+              <a:rPr lang="ja-JP" altLang="en-US" sz="4000" b="1" dirty="0">
+                <a:solidFill>
+                  <a:srgbClr val="FF0000"/>
+                </a:solidFill>
+              </a:rPr>
+              <a:t>チームで３</a:t>
+            </a:r>
+            <a:r>
+              <a:rPr lang="en-US" altLang="ja-JP" sz="4000" b="1" dirty="0">
+                <a:solidFill>
+                  <a:srgbClr val="FF0000"/>
+                </a:solidFill>
+              </a:rPr>
+              <a:t>D</a:t>
+            </a:r>
+            <a:r>
+              <a:rPr lang="ja-JP" altLang="en-US" sz="4000" b="1" dirty="0">
+                <a:solidFill>
+                  <a:srgbClr val="FF0000"/>
+                </a:solidFill>
+              </a:rPr>
+              <a:t>ゲームを作るを最もオススメします。</a:t>
+            </a:r>
+            <a:endParaRPr lang="en-US" altLang="ja-JP" sz="4000" b="1" dirty="0">
+              <a:solidFill>
+                <a:srgbClr val="FF0000"/>
+              </a:solidFill>
+            </a:endParaRPr>
           </a:p>
         </p:txBody>
       </p:sp>
